--- a/pptx/ITI_Database_Course_Lesson_5_Normalization.pptx
+++ b/pptx/ITI_Database_Course_Lesson_5_Normalization.pptx
@@ -30661,7 +30661,7 @@
                 </a:solidFill>
                 <a:latin typeface="Calibri"/>
               </a:rPr>
-              <a:t>Find a table in BCNF violation in your own project, decompose it, and check the join is lossless.</a:t>
+              <a:t>Find a table that violates BCNF in your own project, decompose it, and check the join is lossless.</a:t>
             </a:r>
           </a:p>
         </p:txBody>

--- a/pptx/ITI_Database_Course_Lesson_5_Normalization.pptx
+++ b/pptx/ITI_Database_Course_Lesson_5_Normalization.pptx
@@ -7632,7 +7632,7 @@
                 </a:solidFill>
                 <a:latin typeface="Calibri"/>
               </a:rPr>
-              <a:t>1NF, 2NF and 3NF step by step, then BCNF and beyond.</a:t>
+              <a:t>1NF, 2NF and 3NF step by step, then BCNF, 4NF/5NF, good decompositions and denormalization.</a:t>
             </a:r>
           </a:p>
         </p:txBody>
@@ -12908,7 +12908,7 @@
                 </a:solidFill>
                 <a:latin typeface="Calibri"/>
               </a:rPr>
-              <a:t>1NF, 2NF and 3NF step by step, then BCNF and beyond.</a:t>
+              <a:t>1NF, 2NF and 3NF step by step, then BCNF, 4NF/5NF, good decompositions and denormalization.</a:t>
             </a:r>
           </a:p>
         </p:txBody>
@@ -13040,7 +13040,7 @@
                 </a:solidFill>
                 <a:latin typeface="Calibri"/>
               </a:rPr>
-              <a:t>An ITI student sheet, real school data, and a suppliers table.</a:t>
+              <a:t>An ITI student sheet, real school data and a suppliers table.</a:t>
             </a:r>
           </a:p>
         </p:txBody>
@@ -19328,7 +19328,7 @@
                 </a:solidFill>
                 <a:latin typeface="Calibri"/>
               </a:rPr>
-              <a:t>An ITI student sheet, real school data, and a suppliers table.</a:t>
+              <a:t>An ITI student sheet, real school data and a suppliers table.</a:t>
             </a:r>
           </a:p>
         </p:txBody>
